--- a/examples/03-premium-sales-pitch.pptx
+++ b/examples/03-premium-sales-pitch.pptx
@@ -3445,7 +3445,7 @@
               </a:defRPr>
             </a:pPr>
             <a:r>
-              <a:t>{Attention hook}</a:t>
+              <a:t>Introducing Premium Advisory Service</a:t>
             </a:r>
           </a:p>
         </p:txBody>
@@ -3481,7 +3481,7 @@
               </a:defRPr>
             </a:pPr>
             <a:r>
-              <a:t>{Interesting detail}. {Desirable outcome}.</a:t>
+              <a:t>Aurum Partners — Innovation that delivers</a:t>
             </a:r>
           </a:p>
         </p:txBody>
@@ -3641,7 +3641,7 @@
               </a:defRPr>
             </a:pPr>
             <a:r>
-              <a:t>你正面临{问题}</a:t>
+              <a:t>The problem is bigger than you think</a:t>
             </a:r>
           </a:p>
         </p:txBody>
@@ -3677,15 +3677,15 @@
               </a:defRPr>
             </a:pPr>
             <a:r>
-              <a:t>• [problem 要点1]</a:t>
+              <a:t>• Portfolio management is fragmented across 5+ platforms</a:t>
             </a:r>
             <a:br/>
             <a:r>
-              <a:t>• [problem 要点2]</a:t>
+              <a:t>• Risk exposure is invisible until it's too late</a:t>
             </a:r>
             <a:br/>
             <a:r>
-              <a:t>• [problem 要点3]</a:t>
+              <a:t>• Client reporting takes 20+ hours per quarter</a:t>
             </a:r>
           </a:p>
         </p:txBody>
@@ -3748,7 +3748,7 @@
               </a:defRPr>
             </a:pPr>
             <a:r>
-              <a:t>没有{方案}，你每天损失{金额}</a:t>
+              <a:t>This is costing you more than you realize</a:t>
             </a:r>
           </a:p>
         </p:txBody>
@@ -3784,7 +3784,7 @@
               </a:defRPr>
             </a:pPr>
             <a:r>
-              <a:t>[agitation 要点1]</a:t>
+              <a:t>Companies in Financial Services lose an average of $2.4M annually to operational inefficiency</a:t>
             </a:r>
           </a:p>
         </p:txBody>
@@ -3890,7 +3890,7 @@
               </a:defRPr>
             </a:pPr>
             <a:r>
-              <a:t>{Feature}让你{Advantage}</a:t>
+              <a:t>Unified Wealth Intelligence</a:t>
             </a:r>
           </a:p>
         </p:txBody>
@@ -3926,15 +3926,15 @@
               </a:defRPr>
             </a:pPr>
             <a:r>
-              <a:t>• [solution 要点1]</a:t>
+              <a:t>• Multi-custodian aggregation</a:t>
             </a:r>
             <a:br/>
             <a:r>
-              <a:t>• [solution 要点2]</a:t>
+              <a:t>• Real-time risk analytics</a:t>
             </a:r>
             <a:br/>
             <a:r>
-              <a:t>• [solution 要点3]</a:t>
+              <a:t>• Automated client reporting</a:t>
             </a:r>
           </a:p>
         </p:txBody>
@@ -3997,7 +3997,7 @@
               </a:defRPr>
             </a:pPr>
             <a:r>
-              <a:t>{N}+用户信赖{产品}</a:t>
+              <a:t>Proven results across industries</a:t>
             </a:r>
           </a:p>
         </p:txBody>
@@ -4033,15 +4033,15 @@
               </a:defRPr>
             </a:pPr>
             <a:r>
-              <a:t>• [proof 要点1]</a:t>
+              <a:t>• 3 of the top 10 banks use our platform for compliance</a:t>
             </a:r>
             <a:br/>
             <a:r>
-              <a:t>• [proof 要点2]</a:t>
+              <a:t>• 99.99% uptime SLA — backed by service credits</a:t>
             </a:r>
             <a:br/>
             <a:r>
-              <a:t>• [proof 要点3]</a:t>
+              <a:t>• SOC 2 Type II certified, GDPR &amp; CCPA compliant</a:t>
             </a:r>
           </a:p>
         </p:txBody>
@@ -4104,7 +4104,7 @@
               </a:defRPr>
             </a:pPr>
             <a:r>
-              <a:t>{Attention hook}</a:t>
+              <a:t>Limited-time launch offer</a:t>
             </a:r>
           </a:p>
         </p:txBody>
@@ -4140,15 +4140,15 @@
               </a:defRPr>
             </a:pPr>
             <a:r>
-              <a:t>• [offer 要点1]</a:t>
+              <a:t>• 50% off annual plans for the first 12 months</a:t>
             </a:r>
             <a:br/>
             <a:r>
-              <a:t>• [offer 要点2]</a:t>
+              <a:t>• Free onboarding and migration assistance</a:t>
             </a:r>
             <a:br/>
             <a:r>
-              <a:t>• [offer 要点3]</a:t>
+              <a:t>• Dedicated success manager included</a:t>
             </a:r>
           </a:p>
         </p:txBody>
@@ -4211,7 +4211,7 @@
               </a:defRPr>
             </a:pPr>
             <a:r>
-              <a:t>立即{行动}</a:t>
+              <a:t>Try Premium Advisory Service free</a:t>
             </a:r>
           </a:p>
         </p:txBody>
@@ -4247,7 +4247,7 @@
               </a:defRPr>
             </a:pPr>
             <a:r>
-              <a:t>限时{优惠}。</a:t>
+              <a:t>Complimentary portfolio review for qualified investors.</a:t>
             </a:r>
           </a:p>
         </p:txBody>
@@ -4306,7 +4306,7 @@
               </a:defRPr>
             </a:pPr>
             <a:r>
-              <a:t>立即{行动}</a:t>
+              <a:t>Try Premium Advisory Service free</a:t>
             </a:r>
           </a:p>
         </p:txBody>

--- a/examples/03-premium-sales-pitch.pptx
+++ b/examples/03-premium-sales-pitch.pptx
@@ -3416,7 +3416,50 @@
       <p:grpSpPr/>
       <p:sp>
         <p:nvSpPr>
-          <p:cNvPr id="2" name="TextBox 1"/>
+          <p:cNvPr id="2" name="Rectangle 1"/>
+          <p:cNvSpPr/>
+          <p:nvPr/>
+        </p:nvSpPr>
+        <p:spPr>
+          <a:xfrm>
+            <a:off x="0" y="2560320"/>
+            <a:ext cx="12191695" cy="54864"/>
+          </a:xfrm>
+          <a:prstGeom prst="rect">
+            <a:avLst/>
+          </a:prstGeom>
+          <a:solidFill>
+            <a:srgbClr val="D97706"/>
+          </a:solidFill>
+          <a:ln>
+            <a:noFill/>
+          </a:ln>
+        </p:spPr>
+        <p:style>
+          <a:lnRef idx="1">
+            <a:schemeClr val="accent1"/>
+          </a:lnRef>
+          <a:fillRef idx="3">
+            <a:schemeClr val="accent1"/>
+          </a:fillRef>
+          <a:effectRef idx="2">
+            <a:schemeClr val="accent1"/>
+          </a:effectRef>
+          <a:fontRef idx="minor">
+            <a:schemeClr val="lt1"/>
+          </a:fontRef>
+        </p:style>
+        <p:txBody>
+          <a:bodyPr rtlCol="0" anchor="ctr"/>
+          <a:lstStyle/>
+          <a:p>
+            <a:pPr algn="ctr"/>
+          </a:p>
+        </p:txBody>
+      </p:sp>
+      <p:sp>
+        <p:nvSpPr>
+          <p:cNvPr id="3" name="TextBox 2"/>
           <p:cNvSpPr txBox="1"/>
           <p:nvPr/>
         </p:nvSpPr>
@@ -3452,7 +3495,7 @@
       </p:sp>
       <p:sp>
         <p:nvSpPr>
-          <p:cNvPr id="3" name="TextBox 2"/>
+          <p:cNvPr id="4" name="TextBox 3"/>
           <p:cNvSpPr txBox="1"/>
           <p:nvPr/>
         </p:nvSpPr>
@@ -3488,22 +3531,22 @@
       </p:sp>
       <p:sp>
         <p:nvSpPr>
-          <p:cNvPr id="4" name="Rectangle 3"/>
+          <p:cNvPr id="5" name="Rounded Rectangle 4"/>
           <p:cNvSpPr/>
           <p:nvPr/>
         </p:nvSpPr>
         <p:spPr>
           <a:xfrm>
-            <a:off x="5410504" y="274320"/>
+            <a:off x="5410504" y="365760"/>
             <a:ext cx="1371600" cy="457200"/>
           </a:xfrm>
-          <a:prstGeom prst="rect">
+          <a:prstGeom prst="roundRect">
             <a:avLst/>
           </a:prstGeom>
           <a:solidFill>
             <a:srgbClr val="FEF3C7"/>
           </a:solidFill>
-          <a:ln>
+          <a:ln w="12700">
             <a:solidFill>
               <a:srgbClr val="E7E5E4"/>
             </a:solidFill>
@@ -3535,7 +3578,7 @@
               </a:defRPr>
             </a:pPr>
             <a:r>
-              <a:t>[图片: abstract technology innovation]</a:t>
+              <a:t>abstract technology innovation</a:t>
             </a:r>
           </a:p>
         </p:txBody>
@@ -3576,7 +3619,7 @@
         <p:spPr>
           <a:xfrm>
             <a:off x="0" y="0"/>
-            <a:ext cx="12191695" cy="73152"/>
+            <a:ext cx="12191695" cy="54864"/>
           </a:xfrm>
           <a:prstGeom prst="rect">
             <a:avLst/>
@@ -3612,14 +3655,57 @@
       </p:sp>
       <p:sp>
         <p:nvSpPr>
-          <p:cNvPr id="3" name="TextBox 2"/>
+          <p:cNvPr id="3" name="Rectangle 2"/>
+          <p:cNvSpPr/>
+          <p:nvPr/>
+        </p:nvSpPr>
+        <p:spPr>
+          <a:xfrm>
+            <a:off x="0" y="0"/>
+            <a:ext cx="73152" cy="6858000"/>
+          </a:xfrm>
+          <a:prstGeom prst="rect">
+            <a:avLst/>
+          </a:prstGeom>
+          <a:solidFill>
+            <a:srgbClr val="92400E"/>
+          </a:solidFill>
+          <a:ln>
+            <a:noFill/>
+          </a:ln>
+        </p:spPr>
+        <p:style>
+          <a:lnRef idx="1">
+            <a:schemeClr val="accent1"/>
+          </a:lnRef>
+          <a:fillRef idx="3">
+            <a:schemeClr val="accent1"/>
+          </a:fillRef>
+          <a:effectRef idx="2">
+            <a:schemeClr val="accent1"/>
+          </a:effectRef>
+          <a:fontRef idx="minor">
+            <a:schemeClr val="lt1"/>
+          </a:fontRef>
+        </p:style>
+        <p:txBody>
+          <a:bodyPr rtlCol="0" anchor="ctr"/>
+          <a:lstStyle/>
+          <a:p>
+            <a:pPr algn="ctr"/>
+          </a:p>
+        </p:txBody>
+      </p:sp>
+      <p:sp>
+        <p:nvSpPr>
+          <p:cNvPr id="4" name="TextBox 3"/>
           <p:cNvSpPr txBox="1"/>
           <p:nvPr/>
         </p:nvSpPr>
         <p:spPr>
           <a:xfrm>
-            <a:off x="685800" y="365760"/>
-            <a:ext cx="10820095" cy="731520"/>
+            <a:off x="822960" y="457200"/>
+            <a:ext cx="10545775" cy="640080"/>
           </a:xfrm>
           <a:prstGeom prst="rect">
             <a:avLst/>
@@ -3648,14 +3734,57 @@
       </p:sp>
       <p:sp>
         <p:nvSpPr>
-          <p:cNvPr id="4" name="TextBox 3"/>
+          <p:cNvPr id="5" name="Rectangle 4"/>
+          <p:cNvSpPr/>
+          <p:nvPr/>
+        </p:nvSpPr>
+        <p:spPr>
+          <a:xfrm>
+            <a:off x="822960" y="1143000"/>
+            <a:ext cx="1828800" cy="36576"/>
+          </a:xfrm>
+          <a:prstGeom prst="rect">
+            <a:avLst/>
+          </a:prstGeom>
+          <a:solidFill>
+            <a:srgbClr val="D97706"/>
+          </a:solidFill>
+          <a:ln>
+            <a:noFill/>
+          </a:ln>
+        </p:spPr>
+        <p:style>
+          <a:lnRef idx="1">
+            <a:schemeClr val="accent1"/>
+          </a:lnRef>
+          <a:fillRef idx="3">
+            <a:schemeClr val="accent1"/>
+          </a:fillRef>
+          <a:effectRef idx="2">
+            <a:schemeClr val="accent1"/>
+          </a:effectRef>
+          <a:fontRef idx="minor">
+            <a:schemeClr val="lt1"/>
+          </a:fontRef>
+        </p:style>
+        <p:txBody>
+          <a:bodyPr rtlCol="0" anchor="ctr"/>
+          <a:lstStyle/>
+          <a:p>
+            <a:pPr algn="ctr"/>
+          </a:p>
+        </p:txBody>
+      </p:sp>
+      <p:sp>
+        <p:nvSpPr>
+          <p:cNvPr id="6" name="TextBox 5"/>
           <p:cNvSpPr txBox="1"/>
           <p:nvPr/>
         </p:nvSpPr>
         <p:spPr>
           <a:xfrm>
-            <a:off x="685800" y="1371600"/>
-            <a:ext cx="10820095" cy="4572000"/>
+            <a:off x="822960" y="1463040"/>
+            <a:ext cx="6400800" cy="4572000"/>
           </a:xfrm>
           <a:prstGeom prst="rect">
             <a:avLst/>
@@ -3668,7 +3797,13 @@
           </a:bodyPr>
           <a:lstStyle/>
           <a:p>
-            <a:pPr algn="l">
+            <a:pPr lvl="1" algn="l">
+              <a:spcBef>
+                <a:spcPts val="400"/>
+              </a:spcBef>
+              <a:spcAft>
+                <a:spcPts val="800"/>
+              </a:spcAft>
               <a:defRPr sz="1600" b="0">
                 <a:solidFill>
                   <a:srgbClr val="1C1917"/>
@@ -3677,15 +3812,99 @@
               </a:defRPr>
             </a:pPr>
             <a:r>
-              <a:t>• Portfolio management is fragmented across 5+ platforms</a:t>
-            </a:r>
-            <a:br/>
-            <a:r>
-              <a:t>• Risk exposure is invisible until it's too late</a:t>
-            </a:r>
-            <a:br/>
-            <a:r>
-              <a:t>• Client reporting takes 20+ hours per quarter</a:t>
+              <a:t>Portfolio management is fragmented across 5+ platforms</a:t>
+            </a:r>
+          </a:p>
+          <a:p>
+            <a:pPr lvl="1" algn="l">
+              <a:spcBef>
+                <a:spcPts val="400"/>
+              </a:spcBef>
+              <a:spcAft>
+                <a:spcPts val="800"/>
+              </a:spcAft>
+              <a:defRPr sz="1600" b="0">
+                <a:solidFill>
+                  <a:srgbClr val="1C1917"/>
+                </a:solidFill>
+                <a:latin typeface="Inter"/>
+              </a:defRPr>
+            </a:pPr>
+            <a:r>
+              <a:t>Risk exposure is invisible until it's too late</a:t>
+            </a:r>
+          </a:p>
+          <a:p>
+            <a:pPr lvl="1" algn="l">
+              <a:spcBef>
+                <a:spcPts val="400"/>
+              </a:spcBef>
+              <a:spcAft>
+                <a:spcPts val="800"/>
+              </a:spcAft>
+              <a:defRPr sz="1600" b="0">
+                <a:solidFill>
+                  <a:srgbClr val="1C1917"/>
+                </a:solidFill>
+                <a:latin typeface="Inter"/>
+              </a:defRPr>
+            </a:pPr>
+            <a:r>
+              <a:t>Client reporting takes 20+ hours per quarter</a:t>
+            </a:r>
+          </a:p>
+        </p:txBody>
+      </p:sp>
+      <p:sp>
+        <p:nvSpPr>
+          <p:cNvPr id="7" name="Rounded Rectangle 6"/>
+          <p:cNvSpPr/>
+          <p:nvPr/>
+        </p:nvSpPr>
+        <p:spPr>
+          <a:xfrm>
+            <a:off x="7772400" y="1463040"/>
+            <a:ext cx="3657600" cy="4572000"/>
+          </a:xfrm>
+          <a:prstGeom prst="roundRect">
+            <a:avLst/>
+          </a:prstGeom>
+          <a:solidFill>
+            <a:srgbClr val="FEF3C7"/>
+          </a:solidFill>
+          <a:ln w="12700">
+            <a:solidFill>
+              <a:srgbClr val="E7E5E4"/>
+            </a:solidFill>
+          </a:ln>
+        </p:spPr>
+        <p:style>
+          <a:lnRef idx="1">
+            <a:schemeClr val="accent1"/>
+          </a:lnRef>
+          <a:fillRef idx="3">
+            <a:schemeClr val="accent1"/>
+          </a:fillRef>
+          <a:effectRef idx="2">
+            <a:schemeClr val="accent1"/>
+          </a:effectRef>
+          <a:fontRef idx="minor">
+            <a:schemeClr val="lt1"/>
+          </a:fontRef>
+        </p:style>
+        <p:txBody>
+          <a:bodyPr rtlCol="0" anchor="ctr" wrap="square"/>
+          <a:lstStyle/>
+          <a:p>
+            <a:pPr algn="ctr">
+              <a:defRPr sz="1200">
+                <a:solidFill>
+                  <a:srgbClr val="A8A29E"/>
+                </a:solidFill>
+              </a:defRPr>
+            </a:pPr>
+            <a:r>
+              <a:t>frustration stress problem dark</a:t>
             </a:r>
           </a:p>
         </p:txBody>
@@ -3740,7 +3959,7 @@
           <a:lstStyle/>
           <a:p>
             <a:pPr algn="ctr">
-              <a:defRPr sz="12000" b="1">
+              <a:defRPr sz="9600" b="1">
                 <a:solidFill>
                   <a:srgbClr val="D97706"/>
                 </a:solidFill>
@@ -3761,7 +3980,7 @@
         </p:nvSpPr>
         <p:spPr>
           <a:xfrm>
-            <a:off x="1828800" y="4114800"/>
+            <a:off x="1828800" y="3931920"/>
             <a:ext cx="8534095" cy="731520"/>
           </a:xfrm>
           <a:prstGeom prst="rect">
@@ -3776,7 +3995,7 @@
           <a:lstStyle/>
           <a:p>
             <a:pPr algn="ctr">
-              <a:defRPr sz="2400" b="0">
+              <a:defRPr sz="2200" b="0">
                 <a:solidFill>
                   <a:srgbClr val="1C1917"/>
                 </a:solidFill>
@@ -3785,6 +4004,86 @@
             </a:pPr>
             <a:r>
               <a:t>Companies in Financial Services lose an average of $2.4M annually to operational inefficiency</a:t>
+            </a:r>
+          </a:p>
+        </p:txBody>
+      </p:sp>
+      <p:sp>
+        <p:nvSpPr>
+          <p:cNvPr id="4" name="TextBox 3"/>
+          <p:cNvSpPr txBox="1"/>
+          <p:nvPr/>
+        </p:nvSpPr>
+        <p:spPr>
+          <a:xfrm>
+            <a:off x="2286000" y="4846320"/>
+            <a:ext cx="7619695" cy="1371600"/>
+          </a:xfrm>
+          <a:prstGeom prst="rect">
+            <a:avLst/>
+          </a:prstGeom>
+          <a:noFill/>
+        </p:spPr>
+        <p:txBody>
+          <a:bodyPr wrap="square">
+            <a:spAutoFit/>
+          </a:bodyPr>
+          <a:lstStyle/>
+          <a:p>
+            <a:pPr lvl="1" algn="ctr">
+              <a:spcBef>
+                <a:spcPts val="400"/>
+              </a:spcBef>
+              <a:spcAft>
+                <a:spcPts val="800"/>
+              </a:spcAft>
+              <a:defRPr sz="1400" b="0">
+                <a:solidFill>
+                  <a:srgbClr val="A8A29E"/>
+                </a:solidFill>
+                <a:latin typeface="Inter"/>
+              </a:defRPr>
+            </a:pPr>
+            <a:r>
+              <a:t>Each day of delay costs $67K in lost revenue opportunity</a:t>
+            </a:r>
+          </a:p>
+          <a:p>
+            <a:pPr lvl="1" algn="ctr">
+              <a:spcBef>
+                <a:spcPts val="400"/>
+              </a:spcBef>
+              <a:spcAft>
+                <a:spcPts val="800"/>
+              </a:spcAft>
+              <a:defRPr sz="1400" b="0">
+                <a:solidFill>
+                  <a:srgbClr val="A8A29E"/>
+                </a:solidFill>
+                <a:latin typeface="Inter"/>
+              </a:defRPr>
+            </a:pPr>
+            <a:r>
+              <a:t>Competitors who solve this are growing 3x faster</a:t>
+            </a:r>
+          </a:p>
+          <a:p>
+            <a:pPr lvl="1" algn="ctr">
+              <a:spcBef>
+                <a:spcPts val="400"/>
+              </a:spcBef>
+              <a:spcAft>
+                <a:spcPts val="800"/>
+              </a:spcAft>
+              <a:defRPr sz="1400" b="0">
+                <a:solidFill>
+                  <a:srgbClr val="A8A29E"/>
+                </a:solidFill>
+                <a:latin typeface="Inter"/>
+              </a:defRPr>
+            </a:pPr>
+            <a:r>
+              <a:t>The gap widens every quarter you wait</a:t>
             </a:r>
           </a:p>
         </p:txBody>
@@ -3825,7 +4124,7 @@
         <p:spPr>
           <a:xfrm>
             <a:off x="0" y="0"/>
-            <a:ext cx="12191695" cy="73152"/>
+            <a:ext cx="12191695" cy="54864"/>
           </a:xfrm>
           <a:prstGeom prst="rect">
             <a:avLst/>
@@ -3867,8 +4166,8 @@
         </p:nvSpPr>
         <p:spPr>
           <a:xfrm>
-            <a:off x="685800" y="365760"/>
-            <a:ext cx="10820095" cy="731520"/>
+            <a:off x="822960" y="457200"/>
+            <a:ext cx="10545775" cy="640080"/>
           </a:xfrm>
           <a:prstGeom prst="rect">
             <a:avLst/>
@@ -3897,45 +4196,344 @@
       </p:sp>
       <p:sp>
         <p:nvSpPr>
-          <p:cNvPr id="4" name="TextBox 3"/>
-          <p:cNvSpPr txBox="1"/>
+          <p:cNvPr id="4" name="Rectangle 3"/>
+          <p:cNvSpPr/>
           <p:nvPr/>
         </p:nvSpPr>
         <p:spPr>
           <a:xfrm>
-            <a:off x="685800" y="1371600"/>
-            <a:ext cx="10820095" cy="4572000"/>
+            <a:off x="822960" y="1143000"/>
+            <a:ext cx="1828800" cy="36576"/>
           </a:xfrm>
           <a:prstGeom prst="rect">
             <a:avLst/>
           </a:prstGeom>
-          <a:noFill/>
-        </p:spPr>
-        <p:txBody>
-          <a:bodyPr wrap="square">
-            <a:spAutoFit/>
-          </a:bodyPr>
+          <a:solidFill>
+            <a:srgbClr val="D97706"/>
+          </a:solidFill>
+          <a:ln>
+            <a:noFill/>
+          </a:ln>
+        </p:spPr>
+        <p:style>
+          <a:lnRef idx="1">
+            <a:schemeClr val="accent1"/>
+          </a:lnRef>
+          <a:fillRef idx="3">
+            <a:schemeClr val="accent1"/>
+          </a:fillRef>
+          <a:effectRef idx="2">
+            <a:schemeClr val="accent1"/>
+          </a:effectRef>
+          <a:fontRef idx="minor">
+            <a:schemeClr val="lt1"/>
+          </a:fontRef>
+        </p:style>
+        <p:txBody>
+          <a:bodyPr rtlCol="0" anchor="ctr"/>
+          <a:lstStyle/>
+          <a:p>
+            <a:pPr algn="ctr"/>
+          </a:p>
+        </p:txBody>
+      </p:sp>
+      <p:sp>
+        <p:nvSpPr>
+          <p:cNvPr id="5" name="Rounded Rectangle 4"/>
+          <p:cNvSpPr/>
+          <p:nvPr/>
+        </p:nvSpPr>
+        <p:spPr>
+          <a:xfrm>
+            <a:off x="822960" y="1554480"/>
+            <a:ext cx="3332073" cy="4389120"/>
+          </a:xfrm>
+          <a:prstGeom prst="roundRect">
+            <a:avLst/>
+          </a:prstGeom>
+          <a:solidFill>
+            <a:srgbClr val="FEF3C7"/>
+          </a:solidFill>
+          <a:ln w="12700">
+            <a:solidFill>
+              <a:srgbClr val="E7E5E4"/>
+            </a:solidFill>
+          </a:ln>
+        </p:spPr>
+        <p:style>
+          <a:lnRef idx="1">
+            <a:schemeClr val="accent1"/>
+          </a:lnRef>
+          <a:fillRef idx="3">
+            <a:schemeClr val="accent1"/>
+          </a:fillRef>
+          <a:effectRef idx="2">
+            <a:schemeClr val="accent1"/>
+          </a:effectRef>
+          <a:fontRef idx="minor">
+            <a:schemeClr val="lt1"/>
+          </a:fontRef>
+        </p:style>
+        <p:txBody>
+          <a:bodyPr rtlCol="0" anchor="ctr" wrap="square" lIns="228600" rIns="228600" tIns="457200"/>
           <a:lstStyle/>
           <a:p>
             <a:pPr algn="l">
-              <a:defRPr sz="1600" b="0">
+              <a:spcAft>
+                <a:spcPts val="600"/>
+              </a:spcAft>
+              <a:defRPr sz="1400">
                 <a:solidFill>
                   <a:srgbClr val="1C1917"/>
                 </a:solidFill>
-                <a:latin typeface="Inter"/>
               </a:defRPr>
             </a:pPr>
             <a:r>
-              <a:t>• Multi-custodian aggregation</a:t>
-            </a:r>
-            <a:br/>
-            <a:r>
-              <a:t>• Real-time risk analytics</a:t>
-            </a:r>
-            <a:br/>
-            <a:r>
-              <a:t>• Automated client reporting</a:t>
-            </a:r>
+              <a:t>Multi-custodian aggregation</a:t>
+            </a:r>
+          </a:p>
+        </p:txBody>
+      </p:sp>
+      <p:sp>
+        <p:nvSpPr>
+          <p:cNvPr id="6" name="Rectangle 5"/>
+          <p:cNvSpPr/>
+          <p:nvPr/>
+        </p:nvSpPr>
+        <p:spPr>
+          <a:xfrm>
+            <a:off x="960120" y="1737360"/>
+            <a:ext cx="457200" cy="54864"/>
+          </a:xfrm>
+          <a:prstGeom prst="rect">
+            <a:avLst/>
+          </a:prstGeom>
+          <a:solidFill>
+            <a:srgbClr val="D97706"/>
+          </a:solidFill>
+          <a:ln>
+            <a:noFill/>
+          </a:ln>
+        </p:spPr>
+        <p:style>
+          <a:lnRef idx="1">
+            <a:schemeClr val="accent1"/>
+          </a:lnRef>
+          <a:fillRef idx="3">
+            <a:schemeClr val="accent1"/>
+          </a:fillRef>
+          <a:effectRef idx="2">
+            <a:schemeClr val="accent1"/>
+          </a:effectRef>
+          <a:fontRef idx="minor">
+            <a:schemeClr val="lt1"/>
+          </a:fontRef>
+        </p:style>
+        <p:txBody>
+          <a:bodyPr rtlCol="0" anchor="ctr"/>
+          <a:lstStyle/>
+          <a:p>
+            <a:pPr algn="ctr"/>
+          </a:p>
+        </p:txBody>
+      </p:sp>
+      <p:sp>
+        <p:nvSpPr>
+          <p:cNvPr id="7" name="Rounded Rectangle 6"/>
+          <p:cNvSpPr/>
+          <p:nvPr/>
+        </p:nvSpPr>
+        <p:spPr>
+          <a:xfrm>
+            <a:off x="4429353" y="1554480"/>
+            <a:ext cx="3332073" cy="4389120"/>
+          </a:xfrm>
+          <a:prstGeom prst="roundRect">
+            <a:avLst/>
+          </a:prstGeom>
+          <a:solidFill>
+            <a:srgbClr val="FEF3C7"/>
+          </a:solidFill>
+          <a:ln w="12700">
+            <a:solidFill>
+              <a:srgbClr val="E7E5E4"/>
+            </a:solidFill>
+          </a:ln>
+        </p:spPr>
+        <p:style>
+          <a:lnRef idx="1">
+            <a:schemeClr val="accent1"/>
+          </a:lnRef>
+          <a:fillRef idx="3">
+            <a:schemeClr val="accent1"/>
+          </a:fillRef>
+          <a:effectRef idx="2">
+            <a:schemeClr val="accent1"/>
+          </a:effectRef>
+          <a:fontRef idx="minor">
+            <a:schemeClr val="lt1"/>
+          </a:fontRef>
+        </p:style>
+        <p:txBody>
+          <a:bodyPr rtlCol="0" anchor="ctr" wrap="square" lIns="228600" rIns="228600" tIns="457200"/>
+          <a:lstStyle/>
+          <a:p>
+            <a:pPr algn="l">
+              <a:spcAft>
+                <a:spcPts val="600"/>
+              </a:spcAft>
+              <a:defRPr sz="1400">
+                <a:solidFill>
+                  <a:srgbClr val="1C1917"/>
+                </a:solidFill>
+              </a:defRPr>
+            </a:pPr>
+            <a:r>
+              <a:t>Real-time risk analytics</a:t>
+            </a:r>
+          </a:p>
+        </p:txBody>
+      </p:sp>
+      <p:sp>
+        <p:nvSpPr>
+          <p:cNvPr id="8" name="Rectangle 7"/>
+          <p:cNvSpPr/>
+          <p:nvPr/>
+        </p:nvSpPr>
+        <p:spPr>
+          <a:xfrm>
+            <a:off x="4566513" y="1737360"/>
+            <a:ext cx="457200" cy="54864"/>
+          </a:xfrm>
+          <a:prstGeom prst="rect">
+            <a:avLst/>
+          </a:prstGeom>
+          <a:solidFill>
+            <a:srgbClr val="D97706"/>
+          </a:solidFill>
+          <a:ln>
+            <a:noFill/>
+          </a:ln>
+        </p:spPr>
+        <p:style>
+          <a:lnRef idx="1">
+            <a:schemeClr val="accent1"/>
+          </a:lnRef>
+          <a:fillRef idx="3">
+            <a:schemeClr val="accent1"/>
+          </a:fillRef>
+          <a:effectRef idx="2">
+            <a:schemeClr val="accent1"/>
+          </a:effectRef>
+          <a:fontRef idx="minor">
+            <a:schemeClr val="lt1"/>
+          </a:fontRef>
+        </p:style>
+        <p:txBody>
+          <a:bodyPr rtlCol="0" anchor="ctr"/>
+          <a:lstStyle/>
+          <a:p>
+            <a:pPr algn="ctr"/>
+          </a:p>
+        </p:txBody>
+      </p:sp>
+      <p:sp>
+        <p:nvSpPr>
+          <p:cNvPr id="9" name="Rounded Rectangle 8"/>
+          <p:cNvSpPr/>
+          <p:nvPr/>
+        </p:nvSpPr>
+        <p:spPr>
+          <a:xfrm>
+            <a:off x="8036661" y="1554480"/>
+            <a:ext cx="3332073" cy="4389120"/>
+          </a:xfrm>
+          <a:prstGeom prst="roundRect">
+            <a:avLst/>
+          </a:prstGeom>
+          <a:solidFill>
+            <a:srgbClr val="FEF3C7"/>
+          </a:solidFill>
+          <a:ln w="12700">
+            <a:solidFill>
+              <a:srgbClr val="E7E5E4"/>
+            </a:solidFill>
+          </a:ln>
+        </p:spPr>
+        <p:style>
+          <a:lnRef idx="1">
+            <a:schemeClr val="accent1"/>
+          </a:lnRef>
+          <a:fillRef idx="3">
+            <a:schemeClr val="accent1"/>
+          </a:fillRef>
+          <a:effectRef idx="2">
+            <a:schemeClr val="accent1"/>
+          </a:effectRef>
+          <a:fontRef idx="minor">
+            <a:schemeClr val="lt1"/>
+          </a:fontRef>
+        </p:style>
+        <p:txBody>
+          <a:bodyPr rtlCol="0" anchor="ctr" wrap="square" lIns="228600" rIns="228600" tIns="457200"/>
+          <a:lstStyle/>
+          <a:p>
+            <a:pPr algn="l">
+              <a:spcAft>
+                <a:spcPts val="600"/>
+              </a:spcAft>
+              <a:defRPr sz="1400">
+                <a:solidFill>
+                  <a:srgbClr val="1C1917"/>
+                </a:solidFill>
+              </a:defRPr>
+            </a:pPr>
+            <a:r>
+              <a:t>Automated client reporting</a:t>
+            </a:r>
+          </a:p>
+        </p:txBody>
+      </p:sp>
+      <p:sp>
+        <p:nvSpPr>
+          <p:cNvPr id="10" name="Rectangle 9"/>
+          <p:cNvSpPr/>
+          <p:nvPr/>
+        </p:nvSpPr>
+        <p:spPr>
+          <a:xfrm>
+            <a:off x="8173821" y="1737360"/>
+            <a:ext cx="457200" cy="54864"/>
+          </a:xfrm>
+          <a:prstGeom prst="rect">
+            <a:avLst/>
+          </a:prstGeom>
+          <a:solidFill>
+            <a:srgbClr val="D97706"/>
+          </a:solidFill>
+          <a:ln>
+            <a:noFill/>
+          </a:ln>
+        </p:spPr>
+        <p:style>
+          <a:lnRef idx="1">
+            <a:schemeClr val="accent1"/>
+          </a:lnRef>
+          <a:fillRef idx="3">
+            <a:schemeClr val="accent1"/>
+          </a:fillRef>
+          <a:effectRef idx="2">
+            <a:schemeClr val="accent1"/>
+          </a:effectRef>
+          <a:fontRef idx="minor">
+            <a:schemeClr val="lt1"/>
+          </a:fontRef>
+        </p:style>
+        <p:txBody>
+          <a:bodyPr rtlCol="0" anchor="ctr"/>
+          <a:lstStyle/>
+          <a:p>
+            <a:pPr algn="ctr"/>
           </a:p>
         </p:txBody>
       </p:sp>
@@ -3968,14 +4566,57 @@
       <p:grpSpPr/>
       <p:sp>
         <p:nvSpPr>
-          <p:cNvPr id="2" name="TextBox 1"/>
+          <p:cNvPr id="2" name="Rectangle 1"/>
+          <p:cNvSpPr/>
+          <p:nvPr/>
+        </p:nvSpPr>
+        <p:spPr>
+          <a:xfrm>
+            <a:off x="0" y="0"/>
+            <a:ext cx="73152" cy="6858000"/>
+          </a:xfrm>
+          <a:prstGeom prst="rect">
+            <a:avLst/>
+          </a:prstGeom>
+          <a:solidFill>
+            <a:srgbClr val="92400E"/>
+          </a:solidFill>
+          <a:ln>
+            <a:noFill/>
+          </a:ln>
+        </p:spPr>
+        <p:style>
+          <a:lnRef idx="1">
+            <a:schemeClr val="accent1"/>
+          </a:lnRef>
+          <a:fillRef idx="3">
+            <a:schemeClr val="accent1"/>
+          </a:fillRef>
+          <a:effectRef idx="2">
+            <a:schemeClr val="accent1"/>
+          </a:effectRef>
+          <a:fontRef idx="minor">
+            <a:schemeClr val="lt1"/>
+          </a:fontRef>
+        </p:style>
+        <p:txBody>
+          <a:bodyPr rtlCol="0" anchor="ctr"/>
+          <a:lstStyle/>
+          <a:p>
+            <a:pPr algn="ctr"/>
+          </a:p>
+        </p:txBody>
+      </p:sp>
+      <p:sp>
+        <p:nvSpPr>
+          <p:cNvPr id="3" name="TextBox 2"/>
           <p:cNvSpPr txBox="1"/>
           <p:nvPr/>
         </p:nvSpPr>
         <p:spPr>
           <a:xfrm>
-            <a:off x="685800" y="365760"/>
-            <a:ext cx="10820095" cy="731520"/>
+            <a:off x="822960" y="457200"/>
+            <a:ext cx="10545775" cy="640080"/>
           </a:xfrm>
           <a:prstGeom prst="rect">
             <a:avLst/>
@@ -4004,14 +4645,57 @@
       </p:sp>
       <p:sp>
         <p:nvSpPr>
-          <p:cNvPr id="3" name="TextBox 2"/>
+          <p:cNvPr id="4" name="Rectangle 3"/>
+          <p:cNvSpPr/>
+          <p:nvPr/>
+        </p:nvSpPr>
+        <p:spPr>
+          <a:xfrm>
+            <a:off x="822960" y="1143000"/>
+            <a:ext cx="1828800" cy="36576"/>
+          </a:xfrm>
+          <a:prstGeom prst="rect">
+            <a:avLst/>
+          </a:prstGeom>
+          <a:solidFill>
+            <a:srgbClr val="D97706"/>
+          </a:solidFill>
+          <a:ln>
+            <a:noFill/>
+          </a:ln>
+        </p:spPr>
+        <p:style>
+          <a:lnRef idx="1">
+            <a:schemeClr val="accent1"/>
+          </a:lnRef>
+          <a:fillRef idx="3">
+            <a:schemeClr val="accent1"/>
+          </a:fillRef>
+          <a:effectRef idx="2">
+            <a:schemeClr val="accent1"/>
+          </a:effectRef>
+          <a:fontRef idx="minor">
+            <a:schemeClr val="lt1"/>
+          </a:fontRef>
+        </p:style>
+        <p:txBody>
+          <a:bodyPr rtlCol="0" anchor="ctr"/>
+          <a:lstStyle/>
+          <a:p>
+            <a:pPr algn="ctr"/>
+          </a:p>
+        </p:txBody>
+      </p:sp>
+      <p:sp>
+        <p:nvSpPr>
+          <p:cNvPr id="5" name="TextBox 4"/>
           <p:cNvSpPr txBox="1"/>
           <p:nvPr/>
         </p:nvSpPr>
         <p:spPr>
           <a:xfrm>
-            <a:off x="685800" y="1371600"/>
-            <a:ext cx="10820095" cy="4572000"/>
+            <a:off x="822960" y="1463040"/>
+            <a:ext cx="6400800" cy="4572000"/>
           </a:xfrm>
           <a:prstGeom prst="rect">
             <a:avLst/>
@@ -4024,7 +4708,13 @@
           </a:bodyPr>
           <a:lstStyle/>
           <a:p>
-            <a:pPr algn="l">
+            <a:pPr lvl="1" algn="l">
+              <a:spcBef>
+                <a:spcPts val="400"/>
+              </a:spcBef>
+              <a:spcAft>
+                <a:spcPts val="800"/>
+              </a:spcAft>
               <a:defRPr sz="1600" b="0">
                 <a:solidFill>
                   <a:srgbClr val="1C1917"/>
@@ -4033,15 +4723,99 @@
               </a:defRPr>
             </a:pPr>
             <a:r>
-              <a:t>• 3 of the top 10 banks use our platform for compliance</a:t>
-            </a:r>
-            <a:br/>
-            <a:r>
-              <a:t>• 99.99% uptime SLA — backed by service credits</a:t>
-            </a:r>
-            <a:br/>
-            <a:r>
-              <a:t>• SOC 2 Type II certified, GDPR &amp; CCPA compliant</a:t>
+              <a:t>3 of the top 10 banks use our platform for compliance</a:t>
+            </a:r>
+          </a:p>
+          <a:p>
+            <a:pPr lvl="1" algn="l">
+              <a:spcBef>
+                <a:spcPts val="400"/>
+              </a:spcBef>
+              <a:spcAft>
+                <a:spcPts val="800"/>
+              </a:spcAft>
+              <a:defRPr sz="1600" b="0">
+                <a:solidFill>
+                  <a:srgbClr val="1C1917"/>
+                </a:solidFill>
+                <a:latin typeface="Inter"/>
+              </a:defRPr>
+            </a:pPr>
+            <a:r>
+              <a:t>99.99% uptime SLA — backed by service credits</a:t>
+            </a:r>
+          </a:p>
+          <a:p>
+            <a:pPr lvl="1" algn="l">
+              <a:spcBef>
+                <a:spcPts val="400"/>
+              </a:spcBef>
+              <a:spcAft>
+                <a:spcPts val="800"/>
+              </a:spcAft>
+              <a:defRPr sz="1600" b="0">
+                <a:solidFill>
+                  <a:srgbClr val="1C1917"/>
+                </a:solidFill>
+                <a:latin typeface="Inter"/>
+              </a:defRPr>
+            </a:pPr>
+            <a:r>
+              <a:t>SOC 2 Type II certified, GDPR &amp; CCPA compliant</a:t>
+            </a:r>
+          </a:p>
+        </p:txBody>
+      </p:sp>
+      <p:sp>
+        <p:nvSpPr>
+          <p:cNvPr id="6" name="Rounded Rectangle 5"/>
+          <p:cNvSpPr/>
+          <p:nvPr/>
+        </p:nvSpPr>
+        <p:spPr>
+          <a:xfrm>
+            <a:off x="7772400" y="1463040"/>
+            <a:ext cx="3657600" cy="4572000"/>
+          </a:xfrm>
+          <a:prstGeom prst="roundRect">
+            <a:avLst/>
+          </a:prstGeom>
+          <a:solidFill>
+            <a:srgbClr val="FEF3C7"/>
+          </a:solidFill>
+          <a:ln w="12700">
+            <a:solidFill>
+              <a:srgbClr val="E7E5E4"/>
+            </a:solidFill>
+          </a:ln>
+        </p:spPr>
+        <p:style>
+          <a:lnRef idx="1">
+            <a:schemeClr val="accent1"/>
+          </a:lnRef>
+          <a:fillRef idx="3">
+            <a:schemeClr val="accent1"/>
+          </a:fillRef>
+          <a:effectRef idx="2">
+            <a:schemeClr val="accent1"/>
+          </a:effectRef>
+          <a:fontRef idx="minor">
+            <a:schemeClr val="lt1"/>
+          </a:fontRef>
+        </p:style>
+        <p:txBody>
+          <a:bodyPr rtlCol="0" anchor="ctr" wrap="square"/>
+          <a:lstStyle/>
+          <a:p>
+            <a:pPr algn="ctr">
+              <a:defRPr sz="1200">
+                <a:solidFill>
+                  <a:srgbClr val="A8A29E"/>
+                </a:solidFill>
+              </a:defRPr>
+            </a:pPr>
+            <a:r>
+              <a:t>data evidence proof results</a:t>
             </a:r>
           </a:p>
         </p:txBody>
@@ -4075,14 +4849,57 @@
       <p:grpSpPr/>
       <p:sp>
         <p:nvSpPr>
-          <p:cNvPr id="2" name="TextBox 1"/>
+          <p:cNvPr id="2" name="Rectangle 1"/>
+          <p:cNvSpPr/>
+          <p:nvPr/>
+        </p:nvSpPr>
+        <p:spPr>
+          <a:xfrm>
+            <a:off x="0" y="0"/>
+            <a:ext cx="12191695" cy="54864"/>
+          </a:xfrm>
+          <a:prstGeom prst="rect">
+            <a:avLst/>
+          </a:prstGeom>
+          <a:solidFill>
+            <a:srgbClr val="D97706"/>
+          </a:solidFill>
+          <a:ln>
+            <a:noFill/>
+          </a:ln>
+        </p:spPr>
+        <p:style>
+          <a:lnRef idx="1">
+            <a:schemeClr val="accent1"/>
+          </a:lnRef>
+          <a:fillRef idx="3">
+            <a:schemeClr val="accent1"/>
+          </a:fillRef>
+          <a:effectRef idx="2">
+            <a:schemeClr val="accent1"/>
+          </a:effectRef>
+          <a:fontRef idx="minor">
+            <a:schemeClr val="lt1"/>
+          </a:fontRef>
+        </p:style>
+        <p:txBody>
+          <a:bodyPr rtlCol="0" anchor="ctr"/>
+          <a:lstStyle/>
+          <a:p>
+            <a:pPr algn="ctr"/>
+          </a:p>
+        </p:txBody>
+      </p:sp>
+      <p:sp>
+        <p:nvSpPr>
+          <p:cNvPr id="3" name="TextBox 2"/>
           <p:cNvSpPr txBox="1"/>
           <p:nvPr/>
         </p:nvSpPr>
         <p:spPr>
           <a:xfrm>
-            <a:off x="685800" y="365760"/>
-            <a:ext cx="10820095" cy="731520"/>
+            <a:off x="1371600" y="1828800"/>
+            <a:ext cx="9448495" cy="1097280"/>
           </a:xfrm>
           <a:prstGeom prst="rect">
             <a:avLst/>
@@ -4095,8 +4912,8 @@
           </a:bodyPr>
           <a:lstStyle/>
           <a:p>
-            <a:pPr algn="l">
-              <a:defRPr sz="2800" b="1">
+            <a:pPr algn="ctr">
+              <a:defRPr sz="4000" b="1">
                 <a:solidFill>
                   <a:srgbClr val="1C1917"/>
                 </a:solidFill>
@@ -4111,14 +4928,14 @@
       </p:sp>
       <p:sp>
         <p:nvSpPr>
-          <p:cNvPr id="3" name="TextBox 2"/>
+          <p:cNvPr id="4" name="TextBox 3"/>
           <p:cNvSpPr txBox="1"/>
           <p:nvPr/>
         </p:nvSpPr>
         <p:spPr>
           <a:xfrm>
-            <a:off x="685800" y="1371600"/>
-            <a:ext cx="10820095" cy="4572000"/>
+            <a:off x="2286000" y="3200400"/>
+            <a:ext cx="7619695" cy="640080"/>
           </a:xfrm>
           <a:prstGeom prst="rect">
             <a:avLst/>
@@ -4131,24 +4948,75 @@
           </a:bodyPr>
           <a:lstStyle/>
           <a:p>
-            <a:pPr algn="l">
-              <a:defRPr sz="1600" b="0">
+            <a:pPr algn="ctr">
+              <a:defRPr sz="1800" b="0">
                 <a:solidFill>
-                  <a:srgbClr val="1C1917"/>
+                  <a:srgbClr val="A8A29E"/>
                 </a:solidFill>
                 <a:latin typeface="Inter"/>
               </a:defRPr>
             </a:pPr>
             <a:r>
-              <a:t>• 50% off annual plans for the first 12 months</a:t>
-            </a:r>
-            <a:br/>
-            <a:r>
-              <a:t>• Free onboarding and migration assistance</a:t>
-            </a:r>
-            <a:br/>
-            <a:r>
-              <a:t>• Dedicated success manager included</a:t>
+              <a:t>Lock in early-adopter pricing before it expires</a:t>
+            </a:r>
+          </a:p>
+        </p:txBody>
+      </p:sp>
+      <p:sp>
+        <p:nvSpPr>
+          <p:cNvPr id="5" name="Rounded Rectangle 4"/>
+          <p:cNvSpPr/>
+          <p:nvPr/>
+        </p:nvSpPr>
+        <p:spPr>
+          <a:xfrm>
+            <a:off x="4267504" y="4389120"/>
+            <a:ext cx="3657600" cy="731520"/>
+          </a:xfrm>
+          <a:prstGeom prst="roundRect">
+            <a:avLst/>
+          </a:prstGeom>
+          <a:solidFill>
+            <a:srgbClr val="92400E"/>
+          </a:solidFill>
+          <a:ln>
+            <a:noFill/>
+          </a:ln>
+          <a:effectLst>
+            <a:outerShdw blurRad="101600" dist="38100" dir="5400000" algn="tl" rotWithShape="0">
+              <a:srgbClr val="000000">
+                <a:alpha val="20000"/>
+              </a:srgbClr>
+            </a:outerShdw>
+          </a:effectLst>
+        </p:spPr>
+        <p:style>
+          <a:lnRef idx="1">
+            <a:schemeClr val="accent1"/>
+          </a:lnRef>
+          <a:fillRef idx="3">
+            <a:schemeClr val="accent1"/>
+          </a:fillRef>
+          <a:effectRef idx="2">
+            <a:schemeClr val="accent1"/>
+          </a:effectRef>
+          <a:fontRef idx="minor">
+            <a:schemeClr val="lt1"/>
+          </a:fontRef>
+        </p:style>
+        <p:txBody>
+          <a:bodyPr rtlCol="0" anchor="ctr" wrap="square"/>
+          <a:lstStyle/>
+          <a:p>
+            <a:pPr algn="ctr">
+              <a:defRPr sz="1800" b="1">
+                <a:solidFill>
+                  <a:srgbClr val="FFFFFF"/>
+                </a:solidFill>
+              </a:defRPr>
+            </a:pPr>
+            <a:r>
+              <a:t>Limited-time launch offer</a:t>
             </a:r>
           </a:p>
         </p:txBody>
@@ -4182,14 +5050,57 @@
       <p:grpSpPr/>
       <p:sp>
         <p:nvSpPr>
-          <p:cNvPr id="2" name="TextBox 1"/>
+          <p:cNvPr id="2" name="Rectangle 1"/>
+          <p:cNvSpPr/>
+          <p:nvPr/>
+        </p:nvSpPr>
+        <p:spPr>
+          <a:xfrm>
+            <a:off x="0" y="0"/>
+            <a:ext cx="12191695" cy="54864"/>
+          </a:xfrm>
+          <a:prstGeom prst="rect">
+            <a:avLst/>
+          </a:prstGeom>
+          <a:solidFill>
+            <a:srgbClr val="D97706"/>
+          </a:solidFill>
+          <a:ln>
+            <a:noFill/>
+          </a:ln>
+        </p:spPr>
+        <p:style>
+          <a:lnRef idx="1">
+            <a:schemeClr val="accent1"/>
+          </a:lnRef>
+          <a:fillRef idx="3">
+            <a:schemeClr val="accent1"/>
+          </a:fillRef>
+          <a:effectRef idx="2">
+            <a:schemeClr val="accent1"/>
+          </a:effectRef>
+          <a:fontRef idx="minor">
+            <a:schemeClr val="lt1"/>
+          </a:fontRef>
+        </p:style>
+        <p:txBody>
+          <a:bodyPr rtlCol="0" anchor="ctr"/>
+          <a:lstStyle/>
+          <a:p>
+            <a:pPr algn="ctr"/>
+          </a:p>
+        </p:txBody>
+      </p:sp>
+      <p:sp>
+        <p:nvSpPr>
+          <p:cNvPr id="3" name="TextBox 2"/>
           <p:cNvSpPr txBox="1"/>
           <p:nvPr/>
         </p:nvSpPr>
         <p:spPr>
           <a:xfrm>
             <a:off x="1371600" y="1828800"/>
-            <a:ext cx="9448495" cy="1371600"/>
+            <a:ext cx="9448495" cy="1097280"/>
           </a:xfrm>
           <a:prstGeom prst="rect">
             <a:avLst/>
@@ -4203,7 +5114,7 @@
           <a:lstStyle/>
           <a:p>
             <a:pPr algn="ctr">
-              <a:defRPr sz="4400" b="1">
+              <a:defRPr sz="4000" b="1">
                 <a:solidFill>
                   <a:srgbClr val="1C1917"/>
                 </a:solidFill>
@@ -4218,14 +5129,14 @@
       </p:sp>
       <p:sp>
         <p:nvSpPr>
-          <p:cNvPr id="3" name="TextBox 2"/>
+          <p:cNvPr id="4" name="TextBox 3"/>
           <p:cNvSpPr txBox="1"/>
           <p:nvPr/>
         </p:nvSpPr>
         <p:spPr>
           <a:xfrm>
-            <a:off x="2286000" y="3474720"/>
-            <a:ext cx="7619695" cy="731520"/>
+            <a:off x="2286000" y="3200400"/>
+            <a:ext cx="7619695" cy="640080"/>
           </a:xfrm>
           <a:prstGeom prst="rect">
             <a:avLst/>
@@ -4239,7 +5150,7 @@
           <a:lstStyle/>
           <a:p>
             <a:pPr algn="ctr">
-              <a:defRPr sz="2000" b="0">
+              <a:defRPr sz="1800" b="0">
                 <a:solidFill>
                   <a:srgbClr val="A8A29E"/>
                 </a:solidFill>
@@ -4254,13 +5165,13 @@
       </p:sp>
       <p:sp>
         <p:nvSpPr>
-          <p:cNvPr id="4" name="Rounded Rectangle 3"/>
+          <p:cNvPr id="5" name="Rounded Rectangle 4"/>
           <p:cNvSpPr/>
           <p:nvPr/>
         </p:nvSpPr>
         <p:spPr>
           <a:xfrm>
-            <a:off x="4267504" y="4572000"/>
+            <a:off x="4267504" y="4389120"/>
             <a:ext cx="3657600" cy="731520"/>
           </a:xfrm>
           <a:prstGeom prst="roundRect">
@@ -4273,9 +5184,9 @@
             <a:noFill/>
           </a:ln>
           <a:effectLst>
-            <a:outerShdw blurRad="76200" dist="38100" dir="5400000" algn="tl" rotWithShape="0">
+            <a:outerShdw blurRad="101600" dist="38100" dir="5400000" algn="tl" rotWithShape="0">
               <a:srgbClr val="000000">
-                <a:alpha val="25000"/>
+                <a:alpha val="20000"/>
               </a:srgbClr>
             </a:outerShdw>
           </a:effectLst>

--- a/examples/03-premium-sales-pitch.pptx
+++ b/examples/03-premium-sales-pitch.pptx
@@ -3529,60 +3529,30 @@
           </a:p>
         </p:txBody>
       </p:sp>
-      <p:sp>
-        <p:nvSpPr>
-          <p:cNvPr id="5" name="Rounded Rectangle 4"/>
-          <p:cNvSpPr/>
+      <p:pic>
+        <p:nvPicPr>
+          <p:cNvPr id="5" name="Picture 4" descr="d06affc47b48ae94b587c226d56762b7.png"/>
+          <p:cNvPicPr>
+            <a:picLocks noChangeAspect="1"/>
+          </p:cNvPicPr>
           <p:nvPr/>
-        </p:nvSpPr>
+        </p:nvPicPr>
+        <p:blipFill>
+          <a:blip r:embed="rId2"/>
+          <a:stretch>
+            <a:fillRect/>
+          </a:stretch>
+        </p:blipFill>
         <p:spPr>
           <a:xfrm>
             <a:off x="5410504" y="365760"/>
             <a:ext cx="1371600" cy="457200"/>
           </a:xfrm>
-          <a:prstGeom prst="roundRect">
+          <a:prstGeom prst="rect">
             <a:avLst/>
           </a:prstGeom>
-          <a:solidFill>
-            <a:srgbClr val="FEF3C7"/>
-          </a:solidFill>
-          <a:ln w="12700">
-            <a:solidFill>
-              <a:srgbClr val="E7E5E4"/>
-            </a:solidFill>
-          </a:ln>
-        </p:spPr>
-        <p:style>
-          <a:lnRef idx="1">
-            <a:schemeClr val="accent1"/>
-          </a:lnRef>
-          <a:fillRef idx="3">
-            <a:schemeClr val="accent1"/>
-          </a:fillRef>
-          <a:effectRef idx="2">
-            <a:schemeClr val="accent1"/>
-          </a:effectRef>
-          <a:fontRef idx="minor">
-            <a:schemeClr val="lt1"/>
-          </a:fontRef>
-        </p:style>
-        <p:txBody>
-          <a:bodyPr rtlCol="0" anchor="ctr" wrap="square"/>
-          <a:lstStyle/>
-          <a:p>
-            <a:pPr algn="ctr">
-              <a:defRPr sz="1200">
-                <a:solidFill>
-                  <a:srgbClr val="A8A29E"/>
-                </a:solidFill>
-              </a:defRPr>
-            </a:pPr>
-            <a:r>
-              <a:t>abstract technology innovation</a:t>
-            </a:r>
-          </a:p>
-        </p:txBody>
-      </p:sp>
+        </p:spPr>
+      </p:pic>
     </p:spTree>
   </p:cSld>
   <p:clrMapOvr>
@@ -3855,60 +3825,30 @@
           </a:p>
         </p:txBody>
       </p:sp>
-      <p:sp>
-        <p:nvSpPr>
-          <p:cNvPr id="7" name="Rounded Rectangle 6"/>
-          <p:cNvSpPr/>
+      <p:pic>
+        <p:nvPicPr>
+          <p:cNvPr id="7" name="Picture 6" descr="e3568e1f21f43d0e79e748becdd72c4c.png"/>
+          <p:cNvPicPr>
+            <a:picLocks noChangeAspect="1"/>
+          </p:cNvPicPr>
           <p:nvPr/>
-        </p:nvSpPr>
+        </p:nvPicPr>
+        <p:blipFill>
+          <a:blip r:embed="rId2"/>
+          <a:stretch>
+            <a:fillRect/>
+          </a:stretch>
+        </p:blipFill>
         <p:spPr>
           <a:xfrm>
             <a:off x="7772400" y="1463040"/>
             <a:ext cx="3657600" cy="4572000"/>
           </a:xfrm>
-          <a:prstGeom prst="roundRect">
+          <a:prstGeom prst="rect">
             <a:avLst/>
           </a:prstGeom>
-          <a:solidFill>
-            <a:srgbClr val="FEF3C7"/>
-          </a:solidFill>
-          <a:ln w="12700">
-            <a:solidFill>
-              <a:srgbClr val="E7E5E4"/>
-            </a:solidFill>
-          </a:ln>
-        </p:spPr>
-        <p:style>
-          <a:lnRef idx="1">
-            <a:schemeClr val="accent1"/>
-          </a:lnRef>
-          <a:fillRef idx="3">
-            <a:schemeClr val="accent1"/>
-          </a:fillRef>
-          <a:effectRef idx="2">
-            <a:schemeClr val="accent1"/>
-          </a:effectRef>
-          <a:fontRef idx="minor">
-            <a:schemeClr val="lt1"/>
-          </a:fontRef>
-        </p:style>
-        <p:txBody>
-          <a:bodyPr rtlCol="0" anchor="ctr" wrap="square"/>
-          <a:lstStyle/>
-          <a:p>
-            <a:pPr algn="ctr">
-              <a:defRPr sz="1200">
-                <a:solidFill>
-                  <a:srgbClr val="A8A29E"/>
-                </a:solidFill>
-              </a:defRPr>
-            </a:pPr>
-            <a:r>
-              <a:t>frustration stress problem dark</a:t>
-            </a:r>
-          </a:p>
-        </p:txBody>
-      </p:sp>
+        </p:spPr>
+      </p:pic>
     </p:spTree>
   </p:cSld>
   <p:clrMapOvr>
@@ -4766,60 +4706,30 @@
           </a:p>
         </p:txBody>
       </p:sp>
-      <p:sp>
-        <p:nvSpPr>
-          <p:cNvPr id="6" name="Rounded Rectangle 5"/>
-          <p:cNvSpPr/>
+      <p:pic>
+        <p:nvPicPr>
+          <p:cNvPr id="6" name="Picture 5" descr="e3568e1f21f43d0e79e748becdd72c4c.png"/>
+          <p:cNvPicPr>
+            <a:picLocks noChangeAspect="1"/>
+          </p:cNvPicPr>
           <p:nvPr/>
-        </p:nvSpPr>
+        </p:nvPicPr>
+        <p:blipFill>
+          <a:blip r:embed="rId2"/>
+          <a:stretch>
+            <a:fillRect/>
+          </a:stretch>
+        </p:blipFill>
         <p:spPr>
           <a:xfrm>
             <a:off x="7772400" y="1463040"/>
             <a:ext cx="3657600" cy="4572000"/>
           </a:xfrm>
-          <a:prstGeom prst="roundRect">
+          <a:prstGeom prst="rect">
             <a:avLst/>
           </a:prstGeom>
-          <a:solidFill>
-            <a:srgbClr val="FEF3C7"/>
-          </a:solidFill>
-          <a:ln w="12700">
-            <a:solidFill>
-              <a:srgbClr val="E7E5E4"/>
-            </a:solidFill>
-          </a:ln>
-        </p:spPr>
-        <p:style>
-          <a:lnRef idx="1">
-            <a:schemeClr val="accent1"/>
-          </a:lnRef>
-          <a:fillRef idx="3">
-            <a:schemeClr val="accent1"/>
-          </a:fillRef>
-          <a:effectRef idx="2">
-            <a:schemeClr val="accent1"/>
-          </a:effectRef>
-          <a:fontRef idx="minor">
-            <a:schemeClr val="lt1"/>
-          </a:fontRef>
-        </p:style>
-        <p:txBody>
-          <a:bodyPr rtlCol="0" anchor="ctr" wrap="square"/>
-          <a:lstStyle/>
-          <a:p>
-            <a:pPr algn="ctr">
-              <a:defRPr sz="1200">
-                <a:solidFill>
-                  <a:srgbClr val="A8A29E"/>
-                </a:solidFill>
-              </a:defRPr>
-            </a:pPr>
-            <a:r>
-              <a:t>data evidence proof results</a:t>
-            </a:r>
-          </a:p>
-        </p:txBody>
-      </p:sp>
+        </p:spPr>
+      </p:pic>
     </p:spTree>
   </p:cSld>
   <p:clrMapOvr>
